--- a/content/ai-enablement/ai-enablement-demo-beginner.pptx
+++ b/content/ai-enablement/ai-enablement-demo-beginner.pptx
@@ -3861,7 +3861,7 @@
                 </a:solidFill>
                 <a:latin typeface="Calibri"/>
               </a:rPr>
-              <a:t>DECKFM · AI ENABLEMENT · LIVE DEMO</a:t>
+              <a:t>OZ RADIO · AI ENABLEMENT · LIVE DEMO</a:t>
             </a:r>
           </a:p>
         </p:txBody>
@@ -4540,7 +4540,7 @@
                 </a:solidFill>
                 <a:latin typeface="Calibri"/>
               </a:rPr>
-              <a:t>DeckFM · AI enablement · Beginner demo</a:t>
+              <a:t>Oz Radio · AI enablement · Beginner demo</a:t>
             </a:r>
           </a:p>
         </p:txBody>
@@ -5134,7 +5134,7 @@
                 </a:solidFill>
                 <a:latin typeface="Calibri"/>
               </a:rPr>
-              <a:t>DeckFM · AI enablement · Beginner demo</a:t>
+              <a:t>Oz Radio · AI enablement · Beginner demo</a:t>
             </a:r>
           </a:p>
         </p:txBody>
@@ -5726,7 +5726,7 @@
                 </a:solidFill>
                 <a:latin typeface="Calibri"/>
               </a:rPr>
-              <a:t>DeckFM · AI enablement · Beginner demo</a:t>
+              <a:t>Oz Radio · AI enablement · Beginner demo</a:t>
             </a:r>
           </a:p>
         </p:txBody>
@@ -6458,7 +6458,7 @@
                 </a:solidFill>
                 <a:latin typeface="Calibri"/>
               </a:rPr>
-              <a:t>DeckFM · AI enablement · Beginner demo</a:t>
+              <a:t>Oz Radio · AI enablement · Beginner demo</a:t>
             </a:r>
           </a:p>
         </p:txBody>
@@ -6999,7 +6999,7 @@
                 </a:solidFill>
                 <a:latin typeface="Calibri"/>
               </a:rPr>
-              <a:t>DeckFM · AI enablement · Beginner demo</a:t>
+              <a:t>Oz Radio · AI enablement · Beginner demo</a:t>
             </a:r>
           </a:p>
         </p:txBody>
